--- a/learning/P01_zephyr_make_project/slides/P007_原生CMake与目标模型_Windows.pptx
+++ b/learning/P01_zephyr_make_project/slides/P007_原生CMake与目标模型_Windows.pptx
@@ -1318,55 +1318,64 @@
           <a:lstStyle/>
           <a:p>
             <a:r>
+              <a:rPr/>
               <a:t>对应正文：P007_原生CMake与目标模型_Windows.md</a:t>
             </a:r>
           </a:p>
           <a:p>
             <a:r>
+              <a:rPr/>
               <a:t>7.3.2 · 使用要求的传播</a:t>
             </a:r>
           </a:p>
           <a:p>
             <a:r>
+              <a:rPr/>
               <a:t>PRIVATE：给目标自身。</a:t>
             </a:r>
           </a:p>
           <a:p>
             <a:r>
+              <a:rPr/>
               <a:t>PUBLIC：给目标自身，也给使用者。</a:t>
             </a:r>
           </a:p>
           <a:p>
             <a:r>
+              <a:rPr/>
               <a:t>INTERFACE：只给使用者。</a:t>
             </a:r>
           </a:p>
           <a:p>
             <a:r>
-              <a:t>这是目标属性的使用范围，不是 C 语言权限或文件权限。</a:t>
+              <a:rPr>
+                <a:solidFill>
+                  <a:srgbClr val="29263B"/>
+                </a:solidFill>
+              </a:rPr>
+              <a:t>这里按编译要求理解；静态库的最终链接依赖另有传播规则。</a:t>
             </a:r>
           </a:p>
           <a:p>
             <a:endParaRPr/>
           </a:p>
-          <a:p>
-            <a:endParaRPr/>
-          </a:p>
-          <a:p>
-            <a:r>
+          <a:p/>
+          <a:p>
+            <a:r>
+              <a:rPr/>
               <a:t>依据：https://cmake.org/cmake/help/latest/manual/cmake-buildsystem.7.html</a:t>
             </a:r>
           </a:p>
           <a:p>
             <a:r>
+              <a:rPr/>
               <a:t>本机原件：CMake 帮助：manual/cmake-buildsystem.7.rst</a:t>
             </a:r>
           </a:p>
-          <a:p>
-            <a:endParaRPr/>
-          </a:p>
-          <a:p>
-            <a:r>
+          <a:p/>
+          <a:p>
+            <a:r>
+              <a:rPr/>
               <a:t>命令供读者执行；本轮文稿整理未在 G 盘代执行实验。</a:t>
             </a:r>
           </a:p>
@@ -30038,7 +30047,7 @@
                 <a:ea typeface="Microsoft YaHei"/>
                 <a:cs typeface="Microsoft YaHei"/>
               </a:rPr>
-              <a:t>这是目标属性的使用范围，不是 C 语言权限或文件权限。</a:t>
+              <a:t>这里按编译要求理解；静态库的最终链接依赖另有传播规则。</a:t>
             </a:r>
           </a:p>
         </p:txBody>
